--- a/decks/combined-waves/combined-waves_ch2_describing-waves.pptx
+++ b/decks/combined-waves/combined-waves_ch2_describing-waves.pptx
@@ -122,48 +122,48 @@
   <p:extLst>
     <p:ext uri="{521415D9-36F7-43E2-AB2F-B90AF26B5E84}">
       <p14:sectionLst xmlns:p14="http://schemas.microsoft.com/office/powerpoint/2010/main">
-        <p14:section name="Opening" id="{0de54c12-2197-c1b1-04d3-492bce6c8498}">
+        <p14:section name="Opening" id="{64ae5159-2e43-4db5-2ed8-65314f9f22b8}">
           <p14:sldIdLst>
             <p14:sldId id="256"/>
           </p14:sldIdLst>
         </p14:section>
-        <p14:section name="Gate" id="{8533e29b-e946-7756-9130-726ae1a439ca}">
+        <p14:section name="Gate" id="{08d1709f-8af6-d733-c203-2c38b0ecb16e}">
           <p14:sldIdLst>
             <p14:sldId id="257"/>
             <p14:sldId id="258"/>
           </p14:sldIdLst>
         </p14:section>
-        <p14:section name="Pre-teach" id="{445a8680-a182-4050-c8ff-d99e57ee5ea8}">
+        <p14:section name="Pre-teach" id="{2dfc33de-a2cb-28c9-2226-d35740a3be7e}">
           <p14:sldIdLst>
             <p14:sldId id="259"/>
             <p14:sldId id="260"/>
           </p14:sldIdLst>
         </p14:section>
-        <p14:section name="Read-along" id="{fe48eb56-c27f-ab6b-c07d-8c413a6ef1a3}">
+        <p14:section name="Read-along" id="{8cd2506e-9025-e3ba-303c-619f8ac5d500}">
           <p14:sldIdLst>
             <p14:sldId id="261"/>
             <p14:sldId id="262"/>
           </p14:sldIdLst>
         </p14:section>
-        <p14:section name="Teach" id="{c8ba5bb5-2539-bb4f-e215-9882a72fc0d4}">
+        <p14:section name="Teach" id="{efe5d12a-679b-8cd5-7bf8-9a3c41398b6b}">
           <p14:sldIdLst>
             <p14:sldId id="263"/>
             <p14:sldId id="264"/>
             <p14:sldId id="265"/>
           </p14:sldIdLst>
         </p14:section>
-        <p14:section name="Routes" id="{b5ce2030-a6b5-1e40-9321-ab98e8165fc4}">
+        <p14:section name="Routes" id="{50008d05-b630-aa36-412d-e35ef0fe9410}">
           <p14:sldIdLst>
             <p14:sldId id="266"/>
             <p14:sldId id="267"/>
           </p14:sldIdLst>
         </p14:section>
-        <p14:section name="Close" id="{fafafdef-5ae9-9ec5-07fe-b692b9f455c9}">
+        <p14:section name="Close" id="{4dddbd97-7a04-6260-f816-2b272e1bd284}">
           <p14:sldIdLst>
             <p14:sldId id="268"/>
           </p14:sldIdLst>
         </p14:section>
-        <p14:section name="Answers" id="{e2fbe94b-d73c-0bac-d562-7d03284b61fe}">
+        <p14:section name="Answers" id="{06eba394-9029-7f38-a344-2bd8f66a0566}">
           <p14:sldIdLst>
             <p14:sldId id="269"/>
             <p14:sldId id="270"/>
@@ -1313,8 +1313,8 @@
               <a:rPr lang="en-US" dirty="0"/>
               <a:t>Do now — retrieval. Silent, no notes, no help: recall comes before any support. Give about four minutes.
 1. A wave has a frequency of 20 Hz. Calculate its period in seconds.  →  0.05 s
-2. Which distance is the amplitude of a wave?  →  A   from the rest position to the top of a crest
-3. What is the unit of frequency?  →  C   hertz (Hz)
+2. Which distance is the amplitude of a wave?  →  D   from the rest position to the top of a crest
+3. What is the unit of frequency?  →  A   hertz (Hz)
 Circulate: who gets 3/3 (Stretch route), 2/3 (Core), 0–1 (Support)? Use this to route pupils later in the lesson.</a:t>
             </a:r>
             <a:endParaRPr lang="en-US" dirty="0"/>
@@ -1405,8 +1405,8 @@
               <a:rPr lang="en-US" dirty="0"/>
               <a:t>Answers — pupils mark their own in a different colour, then hands up for 3/3, 2/3, 1/3.
 1. 0.05 s. T = 1 ÷ f = 1 ÷ 20 = 0.05 s (exact).
-2. A   from the rest position to the top of a crest. Amplitude is the maximum displacement from the rest position: rest position to crest (or to trough).
-3. C   hertz (Hz). Frequency is measured in hertz, Hz, meaning waves per second.
+2. D   from the rest position to the top of a crest. Amplitude is the maximum displacement from the rest position: rest position to crest (or to trough).
+3. A   hertz (Hz). Frequency is measured in hertz, Hz, meaning waves per second.
 Say the route each score points to: 3/3 Stretch, 2/3 Core, 0–1 Support. Pupils may choose to move up.</a:t>
             </a:r>
             <a:endParaRPr lang="en-US" dirty="0"/>
@@ -9031,7 +9031,7 @@
                 <a:ea typeface="Calibri" pitchFamily="34" charset="-122"/>
                 <a:cs typeface="Calibri" pitchFamily="34" charset="-120"/>
               </a:rPr>
-              <a:t>from the rest position to the top of a crest</a:t>
+              <a:t>from one crest to the next crest</a:t>
             </a:r>
             <a:endParaRPr lang="en-US" sz="1800" dirty="0"/>
           </a:p>
@@ -9068,7 +9068,7 @@
                 <a:ea typeface="Calibri" pitchFamily="34" charset="-122"/>
                 <a:cs typeface="Calibri" pitchFamily="34" charset="-120"/>
               </a:rPr>
-              <a:t>from the top of a crest to the bottom of the next trough</a:t>
+              <a:t>from one compression to the next compression</a:t>
             </a:r>
             <a:endParaRPr lang="en-US" sz="1800" dirty="0"/>
           </a:p>
@@ -9105,7 +9105,7 @@
                 <a:ea typeface="Calibri" pitchFamily="34" charset="-122"/>
                 <a:cs typeface="Calibri" pitchFamily="34" charset="-120"/>
               </a:rPr>
-              <a:t>from one crest to the next crest</a:t>
+              <a:t>from the top of a crest to the bottom of the next trough</a:t>
             </a:r>
             <a:endParaRPr lang="en-US" sz="1800" dirty="0"/>
           </a:p>
@@ -9142,7 +9142,7 @@
                 <a:ea typeface="Calibri" pitchFamily="34" charset="-122"/>
                 <a:cs typeface="Calibri" pitchFamily="34" charset="-120"/>
               </a:rPr>
-              <a:t>from one compression to the next compression</a:t>
+              <a:t>from the rest position to the top of a crest</a:t>
             </a:r>
             <a:endParaRPr lang="en-US" sz="1800" dirty="0"/>
           </a:p>
@@ -9346,7 +9346,7 @@
                 <a:ea typeface="Calibri" pitchFamily="34" charset="-122"/>
                 <a:cs typeface="Calibri" pitchFamily="34" charset="-120"/>
               </a:rPr>
-              <a:t>metre (m)</a:t>
+              <a:t>hertz (Hz)</a:t>
             </a:r>
             <a:endParaRPr lang="en-US" sz="2400" dirty="0"/>
           </a:p>
@@ -9420,7 +9420,7 @@
                 <a:ea typeface="Calibri" pitchFamily="34" charset="-122"/>
                 <a:cs typeface="Calibri" pitchFamily="34" charset="-120"/>
               </a:rPr>
-              <a:t>hertz (Hz)</a:t>
+              <a:t>metre per second (m/s)</a:t>
             </a:r>
             <a:endParaRPr lang="en-US" sz="2400" dirty="0"/>
           </a:p>
@@ -9457,7 +9457,7 @@
                 <a:ea typeface="Calibri" pitchFamily="34" charset="-122"/>
                 <a:cs typeface="Calibri" pitchFamily="34" charset="-120"/>
               </a:rPr>
-              <a:t>metre per second (m/s)</a:t>
+              <a:t>metre (m)</a:t>
             </a:r>
             <a:endParaRPr lang="en-US" sz="2400" dirty="0"/>
           </a:p>
@@ -10108,7 +10108,7 @@
                 <a:ea typeface="Calibri" pitchFamily="34" charset="-122"/>
                 <a:cs typeface="Calibri" pitchFamily="34" charset="-120"/>
               </a:rPr>
-              <a:t>A   from the rest position to the top of a crest</a:t>
+              <a:t>D   from the rest position to the top of a crest</a:t>
             </a:r>
             <a:endParaRPr lang="en-US" sz="2200" dirty="0"/>
           </a:p>
@@ -10358,7 +10358,7 @@
                 <a:ea typeface="Calibri" pitchFamily="34" charset="-122"/>
                 <a:cs typeface="Calibri" pitchFamily="34" charset="-120"/>
               </a:rPr>
-              <a:t>C   hertz (Hz)</a:t>
+              <a:t>A   hertz (Hz)</a:t>
             </a:r>
             <a:endParaRPr lang="en-US" sz="2200" dirty="0"/>
           </a:p>

--- a/decks/combined-waves/combined-waves_ch2_describing-waves.pptx
+++ b/decks/combined-waves/combined-waves_ch2_describing-waves.pptx
@@ -122,48 +122,48 @@
   <p:extLst>
     <p:ext uri="{521415D9-36F7-43E2-AB2F-B90AF26B5E84}">
       <p14:sectionLst xmlns:p14="http://schemas.microsoft.com/office/powerpoint/2010/main">
-        <p14:section name="Opening" id="{64ae5159-2e43-4db5-2ed8-65314f9f22b8}">
+        <p14:section name="Opening" id="{ffe2bf0f-7d5d-b7d3-ccd4-50bb9e5cbcc5}">
           <p14:sldIdLst>
             <p14:sldId id="256"/>
           </p14:sldIdLst>
         </p14:section>
-        <p14:section name="Gate" id="{08d1709f-8af6-d733-c203-2c38b0ecb16e}">
+        <p14:section name="Gate" id="{40befc1c-aca0-195d-23df-18c7bd5fff3e}">
           <p14:sldIdLst>
             <p14:sldId id="257"/>
             <p14:sldId id="258"/>
           </p14:sldIdLst>
         </p14:section>
-        <p14:section name="Pre-teach" id="{2dfc33de-a2cb-28c9-2226-d35740a3be7e}">
+        <p14:section name="Pre-teach" id="{da7220f7-c5f7-829e-911e-fda73e3e7407}">
           <p14:sldIdLst>
             <p14:sldId id="259"/>
             <p14:sldId id="260"/>
           </p14:sldIdLst>
         </p14:section>
-        <p14:section name="Read-along" id="{8cd2506e-9025-e3ba-303c-619f8ac5d500}">
+        <p14:section name="Read-along" id="{77a366a0-7d49-155c-f2bd-2d25552c8bbb}">
           <p14:sldIdLst>
             <p14:sldId id="261"/>
             <p14:sldId id="262"/>
           </p14:sldIdLst>
         </p14:section>
-        <p14:section name="Teach" id="{efe5d12a-679b-8cd5-7bf8-9a3c41398b6b}">
+        <p14:section name="Teach" id="{d8b62cce-f30c-8721-e93c-3cd123ab6b84}">
           <p14:sldIdLst>
             <p14:sldId id="263"/>
             <p14:sldId id="264"/>
             <p14:sldId id="265"/>
           </p14:sldIdLst>
         </p14:section>
-        <p14:section name="Routes" id="{50008d05-b630-aa36-412d-e35ef0fe9410}">
+        <p14:section name="Routes" id="{be253f0b-c8d1-f902-a02f-a3853546e9ae}">
           <p14:sldIdLst>
             <p14:sldId id="266"/>
             <p14:sldId id="267"/>
           </p14:sldIdLst>
         </p14:section>
-        <p14:section name="Close" id="{4dddbd97-7a04-6260-f816-2b272e1bd284}">
+        <p14:section name="Close" id="{1f6eff5c-f0d3-a563-0860-77f11b6dd3b5}">
           <p14:sldIdLst>
             <p14:sldId id="268"/>
           </p14:sldIdLst>
         </p14:section>
-        <p14:section name="Answers" id="{06eba394-9029-7f38-a344-2bd8f66a0566}">
+        <p14:section name="Answers" id="{8cbcd198-57ca-7b6e-a932-d008544c3382}">
           <p14:sldIdLst>
             <p14:sldId id="269"/>
             <p14:sldId id="270"/>
